--- a/dist/초1/국어/말과글/초1_국어_말과글_02_문장부호.pptx
+++ b/dist/초1/국어/말과글/초1_국어_말과글_02_문장부호.pptx
@@ -120,19 +120,19 @@
   <p:extLst>
     <p:ext uri="{521415D9-36F7-43E2-AB2F-B90AF26B5E84}">
       <p14:sectionLst xmlns:p14="http://schemas.microsoft.com/office/powerpoint/2010/main">
-        <p14:section name="도입" id="{1826c943-cf1c-27ce-28e8-34a13053f96c}">
+        <p14:section name="도입" id="{5e5bb734-10be-4250-b227-3b7e79d97ed9}">
           <p14:sldIdLst>
             <p14:sldId id="256"/>
             <p14:sldId id="257"/>
           </p14:sldIdLst>
         </p14:section>
-        <p14:section name="개념" id="{6d966c60-d1f2-9689-27ba-e112eec98179}">
+        <p14:section name="개념" id="{ca137827-21b9-d8dd-bdf5-801fc28e67c2}">
           <p14:sldIdLst>
             <p14:sldId id="258"/>
             <p14:sldId id="259"/>
           </p14:sldIdLst>
         </p14:section>
-        <p14:section name="연습" id="{68b03397-9a91-1886-8f72-941c27536595}">
+        <p14:section name="연습" id="{bb0f17dd-7983-923f-e46f-3b62dae9de5d}">
           <p14:sldIdLst>
             <p14:sldId id="260"/>
             <p14:sldId id="261"/>
@@ -141,19 +141,19 @@
             <p14:sldId id="264"/>
           </p14:sldIdLst>
         </p14:section>
-        <p14:section name="확인" id="{73c76f04-8781-d506-8b8d-3bd34999d529}">
+        <p14:section name="확인" id="{9208dce3-6a63-eec6-9c52-4187a44f32bc}">
           <p14:sldIdLst>
             <p14:sldId id="265"/>
             <p14:sldId id="266"/>
             <p14:sldId id="267"/>
           </p14:sldIdLst>
         </p14:section>
-        <p14:section name="정리" id="{95210da5-bc36-3fee-b3ea-ee0e9f548406}">
+        <p14:section name="정리" id="{c13edcb3-5c3f-3b2e-fb93-dcf98d30e38e}">
           <p14:sldIdLst>
             <p14:sldId id="268"/>
           </p14:sldIdLst>
         </p14:section>
-        <p14:section name="보충" id="{110d15f0-bb7f-a249-3470-8fc8476e47a6}">
+        <p14:section name="보충" id="{056c4442-3ef4-35bd-db2d-4f493d48874f}">
           <p14:sldIdLst>
             <p14:sldId id="269"/>
           </p14:sldIdLst>

--- a/dist/초1/국어/말과글/초1_국어_말과글_02_문장부호.pptx
+++ b/dist/초1/국어/말과글/초1_국어_말과글_02_문장부호.pptx
@@ -120,19 +120,19 @@
   <p:extLst>
     <p:ext uri="{521415D9-36F7-43E2-AB2F-B90AF26B5E84}">
       <p14:sectionLst xmlns:p14="http://schemas.microsoft.com/office/powerpoint/2010/main">
-        <p14:section name="도입" id="{5e5bb734-10be-4250-b227-3b7e79d97ed9}">
+        <p14:section name="도입" id="{bf2403ad-72d4-de8f-f79e-552ca4fe1a9f}">
           <p14:sldIdLst>
             <p14:sldId id="256"/>
             <p14:sldId id="257"/>
           </p14:sldIdLst>
         </p14:section>
-        <p14:section name="개념" id="{ca137827-21b9-d8dd-bdf5-801fc28e67c2}">
+        <p14:section name="개념" id="{50a057df-a5d3-8ad6-cb2c-1bf8d80589e2}">
           <p14:sldIdLst>
             <p14:sldId id="258"/>
             <p14:sldId id="259"/>
           </p14:sldIdLst>
         </p14:section>
-        <p14:section name="연습" id="{bb0f17dd-7983-923f-e46f-3b62dae9de5d}">
+        <p14:section name="연습" id="{b2ffd656-b1a6-7781-085a-ffb2ec3669d2}">
           <p14:sldIdLst>
             <p14:sldId id="260"/>
             <p14:sldId id="261"/>
@@ -141,19 +141,19 @@
             <p14:sldId id="264"/>
           </p14:sldIdLst>
         </p14:section>
-        <p14:section name="확인" id="{9208dce3-6a63-eec6-9c52-4187a44f32bc}">
+        <p14:section name="확인" id="{22d6b29d-d111-7692-9859-4b9fc899bf13}">
           <p14:sldIdLst>
             <p14:sldId id="265"/>
             <p14:sldId id="266"/>
             <p14:sldId id="267"/>
           </p14:sldIdLst>
         </p14:section>
-        <p14:section name="정리" id="{c13edcb3-5c3f-3b2e-fb93-dcf98d30e38e}">
+        <p14:section name="정리" id="{6922c9c4-d0e9-d494-2627-fbcd43d5ba7d}">
           <p14:sldIdLst>
             <p14:sldId id="268"/>
           </p14:sldIdLst>
         </p14:section>
-        <p14:section name="보충" id="{056c4442-3ef4-35bd-db2d-4f493d48874f}">
+        <p14:section name="보충" id="{58d1d6d4-b410-a372-f176-d0113866069f}">
           <p14:sldIdLst>
             <p14:sldId id="269"/>
           </p14:sldIdLst>
